--- a/decks/geog-living-world/geog-living-world_ch5_hot-desert-characteristics.pptx
+++ b/decks/geog-living-world/geog-living-world_ch5_hot-desert-characteristics.pptx
@@ -126,30 +126,30 @@
   <p:extLst>
     <p:ext uri="{521415D9-36F7-43E2-AB2F-B90AF26B5E84}">
       <p14:sectionLst xmlns:p14="http://schemas.microsoft.com/office/powerpoint/2010/main">
-        <p14:section name="Opening" id="{c9da7883-21a5-9735-7ea1-8251ef875c34}">
+        <p14:section name="Opening" id="{c93d9f90-47ae-f6a4-c574-9e8f8f3213f6}">
           <p14:sldIdLst>
             <p14:sldId id="256"/>
           </p14:sldIdLst>
         </p14:section>
-        <p14:section name="Gate" id="{a374ff0e-12e6-0636-a7da-490af57d541c}">
+        <p14:section name="Gate" id="{99011bc7-94b0-dbc3-c350-1a8ddec37c72}">
           <p14:sldIdLst>
             <p14:sldId id="257"/>
             <p14:sldId id="258"/>
           </p14:sldIdLst>
         </p14:section>
-        <p14:section name="Pre-teach" id="{4930e728-ddb2-4f32-7709-be9a3254ea2e}">
+        <p14:section name="Pre-teach" id="{7c3fa7fe-5017-5bb7-be76-3b1f155682a9}">
           <p14:sldIdLst>
             <p14:sldId id="259"/>
             <p14:sldId id="260"/>
           </p14:sldIdLst>
         </p14:section>
-        <p14:section name="Read-along" id="{307a8461-02ab-3674-a83f-bb8e01d19019}">
+        <p14:section name="Read-along" id="{ea4feff0-4da2-9002-b73b-8294c65d9aa6}">
           <p14:sldIdLst>
             <p14:sldId id="261"/>
             <p14:sldId id="262"/>
           </p14:sldIdLst>
         </p14:section>
-        <p14:section name="Teach" id="{311ce062-7aab-ad98-d941-891571aa394c}">
+        <p14:section name="Teach" id="{0188a333-b751-69d6-f062-2598274a33e9}">
           <p14:sldIdLst>
             <p14:sldId id="263"/>
             <p14:sldId id="264"/>
@@ -158,7 +158,7 @@
             <p14:sldId id="267"/>
           </p14:sldIdLst>
         </p14:section>
-        <p14:section name="Routes" id="{1c5a7797-6c7e-ad35-31f4-99b3c022b548}">
+        <p14:section name="Routes" id="{bd6825e8-e59d-001b-3451-1ab3130c41b3}">
           <p14:sldIdLst>
             <p14:sldId id="268"/>
             <p14:sldId id="269"/>
@@ -166,12 +166,12 @@
             <p14:sldId id="271"/>
           </p14:sldIdLst>
         </p14:section>
-        <p14:section name="Close" id="{15af4d66-3670-a741-28fc-f47e9f9106cb}">
+        <p14:section name="Close" id="{e52f93f7-f08e-0d3c-43ce-64a5d430f49c}">
           <p14:sldIdLst>
             <p14:sldId id="272"/>
           </p14:sldIdLst>
         </p14:section>
-        <p14:section name="Answers" id="{eed06ef1-11c9-df6e-4405-6daac54e9b96}">
+        <p14:section name="Answers" id="{dcdea04a-a911-1a2b-dedb-39951d5a3a40}">
           <p14:sldIdLst>
             <p14:sldId id="273"/>
             <p14:sldId id="274"/>
@@ -674,8 +674,8 @@
             <a:r>
               <a:rPr lang="en-US" dirty="0"/>
               <a:t>Teach — Climate and soils. Say it in your own words, then check understanding with a quick question: ask a pupil from the pre-teach group first, since they met these words and ideas before the lesson. Pupils try to recall before you re-explain.
-Desert climates have an extreme temperature range. During the day the temperature may reach 50°C; at night it can fall below 0°C, because there is no cloud to hold the heat in. There is very little rainfall, less than 250 mm a year, and it is unreliable: months of arid conditions are broken by sudden stormy downpours. Winters are mild and summers very hot. Your Sahara climate graph showed a peak temperature of 35°C in July and August, a winter average of about 13°C from December to February, just 2 mm of rain in December, and no rain at all in June, July and September. The conclusion your class wrote: the lower the rainfall, the higher the temperature, and the higher the rainfall, the lower the temperature.
-Desert soils are sandy or stony, with little organic matter because there is so little vegetation to rot into them. They are dry, but can soak up water rapidly after rain. Evaporation draws salts to the surface, often leaving a white residue on the ground. All of this means that desert soils are not particularly fertile, and strong winds blow away layers of topsoil, leaving them thin.
+Desert climates swing further between day and night than any other climate you study. By mid-afternoon the air may be up at 50°C; by dawn it can have dropped below 0°C, because there is no cloud to keep the day's heat in. There is very little rainfall, less than 250 mm a year, and it is unreliable: months of arid conditions are broken by sudden stormy downpours. Winters are mild and summers very hot. Your Sahara climate graph showed a peak temperature of 35°C in July and August, a winter average of about 13°C from December to February, just 2 mm of rain in December, and no rain at all in June, July and September. The conclusion your class wrote: the lower the rainfall, the higher the temperature, and the higher the rainfall, the lower the temperature.
+Desert soils are sandy or stony, with little organic matter because there is so little vegetation to rot into them. They are dry, but can soak up water rapidly after rain. As water evaporates it pulls dissolved salts up with it, and a pale crust is often left behind where it has gone. Put together, this means desert soils are not particularly fertile, and strong winds blow away layers of topsoil, leaving them thin.
 The components of a desert ecosystem are tightly interdependent. The climate (abiotic) is dry, dries out the soil and decides which plants and animals can survive the heat. The soil (abiotic) is dry and thin because of the heat and wind. The vegetation (biotic) is sparse and low-growing because of the lack of rain and the infertile soil. The animals (biotic) have adapted to the harsh climate by storing water, and because the vegetation is so sparse they must roam large areas to find enough to eat.
 Worked example — model it step by step, thinking aloud: On the Sahara climate graph the winter months of December, January and February have average temperatures of 14°C, 12°C and 14°C. What is the average winter temperature? (1) Add the three monthly figures: 14 + 12 + 14 = 40. (2) Divide by the number of months: 40 ÷ 3 = 13.333… (3) Round sensibly and give the unit: about 13.3°C. (4) Check the sense: the answer must sit between the lowest (12) and highest (14) of the three figures, and it does. Answer: About 13.3°C.
 Tip: An average must land between the smallest and largest value you added. If it does not, you have slipped.</a:t>
@@ -767,7 +767,7 @@
             <a:r>
               <a:rPr lang="en-US" dirty="0"/>
               <a:t>Teach — Biodiversity and its threats. Say it in your own words, then check understanding with a quick question: ask a pupil from the pre-teach group first, since they met these words and ideas before the lesson. Pupils try to recall before you re-explain.
-There is plenty of life in the desert if you know where to look. Deserts can be home to a large number of endemic species, plants and animals found naturally in that place and nowhere else. They are usually clustered together in very small areas, often around temporary sources of water such as oases, seasonal rivers and lakes. Biodiversity, the range of plant and animal life in a place, is therefore low across the desert as a whole but concentrated where there is water.
+A desert looks empty until you learn where to look. Many deserts hold a long list of endemic species: plants and animals that live naturally in that one place and nowhere else on Earth. What they all need is water, so they gather into small pockets around oases and around the seasonal rivers and lakes that fill and dry again. Biodiversity, the range of plant and animal life in a place, is therefore low across the desert as a whole but concentrated where there is water.
 That makes it fragile. Human activities such as farming, irrigation and pumping out groundwater threaten those water sources. Climate change is reducing the snowpack and melting the glaciers that feed water to desert communities and wildlife, and longer droughts dry up supplies faster still. The result is habitat loss, and deserts are losing their biodiversity. In the Sahara, animals such as the addax, the cheetah and the dama gazelle are at risk of extinction. The African wild dog is one of the most endangered mammals in the world, with only about 6600 left, most of them in southern Africa and the southern Sahara in Niger; its threats are habitat loss and being killed to protect farm livestock, because when its prey disappears it turns to goats and sheep.
 What is being done? Protected areas are being created, including wildlife corridors that link them, and game reserves protect animals from hunting. But there is still conflict with farmers whose animals are attacked, and protection costs money in some of the poorest regions on Earth.
 Tip: Endemic means found only here. Lose the habitat and the species has nowhere else on Earth to go.</a:t>
@@ -2350,8 +2350,8 @@
             <a:r>
               <a:rPr lang="en-US" dirty="0"/>
               <a:t>Teach — Climate and soils. Say it in your own words, then check understanding with a quick question: ask a pupil from the pre-teach group first, since they met these words and ideas before the lesson. Pupils try to recall before you re-explain.
-Desert climates have an extreme temperature range. During the day the temperature may reach 50°C; at night it can fall below 0°C, because there is no cloud to hold the heat in. There is very little rainfall, less than 250 mm a year, and it is unreliable: months of arid conditions are broken by sudden stormy downpours. Winters are mild and summers very hot. Your Sahara climate graph showed a peak temperature of 35°C in July and August, a winter average of about 13°C from December to February, just 2 mm of rain in December, and no rain at all in June, July and September. The conclusion your class wrote: the lower the rainfall, the higher the temperature, and the higher the rainfall, the lower the temperature.
-Desert soils are sandy or stony, with little organic matter because there is so little vegetation to rot into them. They are dry, but can soak up water rapidly after rain. Evaporation draws salts to the surface, often leaving a white residue on the ground. All of this means that desert soils are not particularly fertile, and strong winds blow away layers of topsoil, leaving them thin.
+Desert climates swing further between day and night than any other climate you study. By mid-afternoon the air may be up at 50°C; by dawn it can have dropped below 0°C, because there is no cloud to keep the day's heat in. There is very little rainfall, less than 250 mm a year, and it is unreliable: months of arid conditions are broken by sudden stormy downpours. Winters are mild and summers very hot. Your Sahara climate graph showed a peak temperature of 35°C in July and August, a winter average of about 13°C from December to February, just 2 mm of rain in December, and no rain at all in June, July and September. The conclusion your class wrote: the lower the rainfall, the higher the temperature, and the higher the rainfall, the lower the temperature.
+Desert soils are sandy or stony, with little organic matter because there is so little vegetation to rot into them. They are dry, but can soak up water rapidly after rain. As water evaporates it pulls dissolved salts up with it, and a pale crust is often left behind where it has gone. Put together, this means desert soils are not particularly fertile, and strong winds blow away layers of topsoil, leaving them thin.
 The components of a desert ecosystem are tightly interdependent. The climate (abiotic) is dry, dries out the soil and decides which plants and animals can survive the heat. The soil (abiotic) is dry and thin because of the heat and wind. The vegetation (biotic) is sparse and low-growing because of the lack of rain and the infertile soil. The animals (biotic) have adapted to the harsh climate by storing water, and because the vegetation is so sparse they must roam large areas to find enough to eat.
 Worked example — model it step by step, thinking aloud: On the Sahara climate graph the winter months of December, January and February have average temperatures of 14°C, 12°C and 14°C. What is the average winter temperature? (1) Add the three monthly figures: 14 + 12 + 14 = 40. (2) Divide by the number of months: 40 ÷ 3 = 13.333… (3) Round sensibly and give the unit: about 13.3°C. (4) Check the sense: the answer must sit between the lowest (12) and highest (14) of the three figures, and it does. Answer: About 13.3°C.
 Tip: An average must land between the smallest and largest value you added. If it does not, you have slipped.</a:t>
@@ -5177,7 +5177,7 @@
                 <a:ea typeface="Calibri" pitchFamily="34" charset="-122"/>
                 <a:cs typeface="Calibri" pitchFamily="34" charset="-120"/>
               </a:rPr>
-              <a:t>There is plenty of life in the desert if you know where to look.</a:t>
+              <a:t>A desert looks empty until you learn where to look.</a:t>
             </a:r>
             <a:endParaRPr lang="en-US" sz="2200" dirty="0"/>
           </a:p>
@@ -17657,7 +17657,7 @@
                 <a:ea typeface="Calibri" pitchFamily="34" charset="-122"/>
                 <a:cs typeface="Calibri" pitchFamily="34" charset="-120"/>
               </a:rPr>
-              <a:t>Desert climates have an extreme temperature range. During the day the temperature may reach 50°C; at night it can fall below 0°C, because there is no cloud to hold the heat in.</a:t>
+              <a:t>Desert climates swing further between day and night than any other climate you study.</a:t>
             </a:r>
             <a:endParaRPr lang="en-US" sz="1800" dirty="0"/>
           </a:p>
